--- a/output/part1/deck.pptx
+++ b/output/part1/deck.pptx
@@ -4513,7 +4513,9 @@
                 <a:solidFill>
                   <a:srgbClr val="16181D"/>
                 </a:solidFill>
-                <a:latin typeface="Pretendard"/>
+                <a:latin typeface="Apple SD Gothic Neo"/>
+                <a:ea typeface="Apple SD Gothic Neo"/>
+                <a:cs typeface="Apple SD Gothic Neo"/>
               </a:rPr>
               <a:t>기록 시스템에서 시작하는 AI 네이티브 컴퍼니</a:t>
             </a:r>
@@ -4548,7 +4550,9 @@
                 <a:solidFill>
                   <a:srgbClr val="4A4F5A"/>
                 </a:solidFill>
-                <a:latin typeface="Pretendard"/>
+                <a:latin typeface="Apple SD Gothic Neo"/>
+                <a:ea typeface="Apple SD Gothic Neo"/>
+                <a:cs typeface="Apple SD Gothic Neo"/>
               </a:rPr>
               <a:t>회사의 실체는 중앙에 쌓인 데이터다. 전환은 도구 도입이 아니라 기록 시스템 구축에서 시작한다</a:t>
             </a:r>
@@ -4583,7 +4587,9 @@
                 <a:solidFill>
                   <a:srgbClr val="4A4F5A"/>
                 </a:solidFill>
-                <a:latin typeface="Pretendard"/>
+                <a:latin typeface="Apple SD Gothic Neo"/>
+                <a:ea typeface="Apple SD Gothic Neo"/>
+                <a:cs typeface="Apple SD Gothic Neo"/>
               </a:rPr>
               <a:t>김승권 (활동명 빌더 조슈) · 조슈아의컴퍼니 대표</a:t>
             </a:r>
@@ -4687,7 +4693,9 @@
                 <a:solidFill>
                   <a:srgbClr val="16181D"/>
                 </a:solidFill>
-                <a:latin typeface="Pretendard"/>
+                <a:latin typeface="Apple SD Gothic Neo"/>
+                <a:ea typeface="Apple SD Gothic Neo"/>
+                <a:cs typeface="Apple SD Gothic Neo"/>
               </a:rPr>
               <a:t>“AI 네이티브 컴퍼니는 기록 시스템으로부터 출발을 합니다.”</a:t>
             </a:r>
@@ -4722,7 +4730,9 @@
                 <a:solidFill>
                   <a:srgbClr val="4A4F5A"/>
                 </a:solidFill>
-                <a:latin typeface="Pretendard"/>
+                <a:latin typeface="Apple SD Gothic Neo"/>
+                <a:ea typeface="Apple SD Gothic Neo"/>
+                <a:cs typeface="Apple SD Gothic Neo"/>
               </a:rPr>
               <a:t>— 김승권</a:t>
             </a:r>
@@ -4826,7 +4836,9 @@
                 <a:solidFill>
                   <a:srgbClr val="16181D"/>
                 </a:solidFill>
-                <a:latin typeface="Pretendard"/>
+                <a:latin typeface="Apple SD Gothic Neo"/>
+                <a:ea typeface="Apple SD Gothic Neo"/>
+                <a:cs typeface="Apple SD Gothic Neo"/>
               </a:rPr>
               <a:t>기록 시스템은 이렇게 만든다</a:t>
             </a:r>
@@ -4930,7 +4942,9 @@
                 <a:solidFill>
                   <a:srgbClr val="16181D"/>
                 </a:solidFill>
-                <a:latin typeface="Pretendard"/>
+                <a:latin typeface="Apple SD Gothic Neo"/>
+                <a:ea typeface="Apple SD Gothic Neo"/>
+                <a:cs typeface="Apple SD Gothic Neo"/>
               </a:rPr>
               <a:t>먼저 맥락 허브를 만들고 도구를 한곳에 모은다</a:t>
             </a:r>
@@ -4965,11 +4979,13 @@
               </a:spcAft>
             </a:pPr>
             <a:r>
-              <a:rPr sz="1900">
+              <a:rPr sz="1900" b="0">
                 <a:solidFill>
                   <a:srgbClr val="4A4F5A"/>
                 </a:solidFill>
-                <a:latin typeface="Pretendard"/>
+                <a:latin typeface="Apple SD Gothic Neo"/>
+                <a:ea typeface="Apple SD Gothic Neo"/>
+                <a:cs typeface="Apple SD Gothic Neo"/>
               </a:rPr>
               <a:t>· 지메일·노션 등 과거 데이터를 전량 적재</a:t>
             </a:r>
@@ -4981,11 +4997,13 @@
               </a:spcAft>
             </a:pPr>
             <a:r>
-              <a:rPr sz="1900">
+              <a:rPr sz="1900" b="0">
                 <a:solidFill>
                   <a:srgbClr val="4A4F5A"/>
                 </a:solidFill>
-                <a:latin typeface="Pretendard"/>
+                <a:latin typeface="Apple SD Gothic Neo"/>
+                <a:ea typeface="Apple SD Gothic Neo"/>
+                <a:cs typeface="Apple SD Gothic Neo"/>
               </a:rPr>
               <a:t>· RAG로도 함께 넣어 검색 가능하게</a:t>
             </a:r>
@@ -4997,11 +5015,13 @@
               </a:spcAft>
             </a:pPr>
             <a:r>
-              <a:rPr sz="1900">
+              <a:rPr sz="1900" b="0">
                 <a:solidFill>
                   <a:srgbClr val="4A4F5A"/>
                 </a:solidFill>
-                <a:latin typeface="Pretendard"/>
+                <a:latin typeface="Apple SD Gothic Neo"/>
+                <a:ea typeface="Apple SD Gothic Neo"/>
+                <a:cs typeface="Apple SD Gothic Neo"/>
               </a:rPr>
               <a:t>· 슬랙·노션·ERP를 한 서버로 통합</a:t>
             </a:r>
@@ -5013,11 +5033,13 @@
               </a:spcAft>
             </a:pPr>
             <a:r>
-              <a:rPr sz="1900">
+              <a:rPr sz="1900" b="0">
                 <a:solidFill>
                   <a:srgbClr val="4A4F5A"/>
                 </a:solidFill>
-                <a:latin typeface="Pretendard"/>
+                <a:latin typeface="Apple SD Gothic Neo"/>
+                <a:ea typeface="Apple SD Gothic Neo"/>
+                <a:cs typeface="Apple SD Gothic Neo"/>
               </a:rPr>
               <a:t>· 에이전트가 슬랙에서 실제로 일한다</a:t>
             </a:r>
@@ -5121,7 +5143,9 @@
                 <a:solidFill>
                   <a:srgbClr val="16181D"/>
                 </a:solidFill>
-                <a:latin typeface="Pretendard"/>
+                <a:latin typeface="Apple SD Gothic Neo"/>
+                <a:ea typeface="Apple SD Gothic Neo"/>
+                <a:cs typeface="Apple SD Gothic Neo"/>
               </a:rPr>
               <a:t>기록의 최신화는 사람이 의도적으로 공급한다</a:t>
             </a:r>
@@ -5156,11 +5180,13 @@
               </a:spcAft>
             </a:pPr>
             <a:r>
-              <a:rPr sz="1900">
+              <a:rPr sz="1900" b="0">
                 <a:solidFill>
                   <a:srgbClr val="4A4F5A"/>
                 </a:solidFill>
-                <a:latin typeface="Pretendard"/>
+                <a:latin typeface="Apple SD Gothic Neo"/>
+                <a:ea typeface="Apple SD Gothic Neo"/>
+                <a:cs typeface="Apple SD Gothic Neo"/>
               </a:rPr>
               <a:t>· 매일 아침 조간 회의를 일부러 배치</a:t>
             </a:r>
@@ -5172,11 +5198,13 @@
               </a:spcAft>
             </a:pPr>
             <a:r>
-              <a:rPr sz="1900">
+              <a:rPr sz="1900" b="0">
                 <a:solidFill>
                   <a:srgbClr val="4A4F5A"/>
                 </a:solidFill>
-                <a:latin typeface="Pretendard"/>
+                <a:latin typeface="Apple SD Gothic Neo"/>
+                <a:ea typeface="Apple SD Gothic Neo"/>
+                <a:cs typeface="Apple SD Gothic Neo"/>
               </a:rPr>
               <a:t>· 각자의 진행 상황과 병목을 토론</a:t>
             </a:r>
@@ -5188,11 +5216,13 @@
               </a:spcAft>
             </a:pPr>
             <a:r>
-              <a:rPr sz="1900">
+              <a:rPr sz="1900" b="0">
                 <a:solidFill>
                   <a:srgbClr val="4A4F5A"/>
                 </a:solidFill>
-                <a:latin typeface="Pretendard"/>
+                <a:latin typeface="Apple SD Gothic Neo"/>
+                <a:ea typeface="Apple SD Gothic Neo"/>
+                <a:cs typeface="Apple SD Gothic Neo"/>
               </a:rPr>
               <a:t>· 회의록은 곧바로 슬랙에 적재</a:t>
             </a:r>
@@ -5204,11 +5234,13 @@
               </a:spcAft>
             </a:pPr>
             <a:r>
-              <a:rPr sz="1900">
+              <a:rPr sz="1900" b="0">
                 <a:solidFill>
                   <a:srgbClr val="4A4F5A"/>
                 </a:solidFill>
-                <a:latin typeface="Pretendard"/>
+                <a:latin typeface="Apple SD Gothic Neo"/>
+                <a:ea typeface="Apple SD Gothic Neo"/>
+                <a:cs typeface="Apple SD Gothic Neo"/>
               </a:rPr>
               <a:t>· 마크다운과 RAG 양쪽으로 요약 저장</a:t>
             </a:r>
@@ -5312,7 +5344,9 @@
                 <a:solidFill>
                   <a:srgbClr val="16181D"/>
                 </a:solidFill>
-                <a:latin typeface="Pretendard"/>
+                <a:latin typeface="Apple SD Gothic Neo"/>
+                <a:ea typeface="Apple SD Gothic Neo"/>
+                <a:cs typeface="Apple SD Gothic Neo"/>
               </a:rPr>
               <a:t>쌓은 데이터로 문서와 산출물이 매일 스스로 갱신된다</a:t>
             </a:r>
@@ -5347,11 +5381,13 @@
               </a:spcAft>
             </a:pPr>
             <a:r>
-              <a:rPr sz="1900">
+              <a:rPr sz="1900" b="0">
                 <a:solidFill>
                   <a:srgbClr val="4A4F5A"/>
                 </a:solidFill>
-                <a:latin typeface="Pretendard"/>
+                <a:latin typeface="Apple SD Gothic Neo"/>
+                <a:ea typeface="Apple SD Gothic Neo"/>
+                <a:cs typeface="Apple SD Gothic Neo"/>
               </a:rPr>
               <a:t>· SOP를 AI가 매일 마크다운으로 갱신</a:t>
             </a:r>
@@ -5363,11 +5399,13 @@
               </a:spcAft>
             </a:pPr>
             <a:r>
-              <a:rPr sz="1900">
+              <a:rPr sz="1900" b="0">
                 <a:solidFill>
                   <a:srgbClr val="4A4F5A"/>
                 </a:solidFill>
-                <a:latin typeface="Pretendard"/>
+                <a:latin typeface="Apple SD Gothic Neo"/>
+                <a:ea typeface="Apple SD Gothic Neo"/>
+                <a:cs typeface="Apple SD Gothic Neo"/>
               </a:rPr>
               <a:t>· 클라이언트·도메인별 문서는 크론으로</a:t>
             </a:r>
@@ -5379,11 +5417,13 @@
               </a:spcAft>
             </a:pPr>
             <a:r>
-              <a:rPr sz="1900">
+              <a:rPr sz="1900" b="0">
                 <a:solidFill>
                   <a:srgbClr val="4A4F5A"/>
                 </a:solidFill>
-                <a:latin typeface="Pretendard"/>
+                <a:latin typeface="Apple SD Gothic Neo"/>
+                <a:ea typeface="Apple SD Gothic Neo"/>
+                <a:cs typeface="Apple SD Gothic Neo"/>
               </a:rPr>
               <a:t>· 하네스와 프롬프트를 정비해 품질 조정</a:t>
             </a:r>
@@ -5395,11 +5435,13 @@
               </a:spcAft>
             </a:pPr>
             <a:r>
-              <a:rPr sz="1900">
+              <a:rPr sz="1900" b="0">
                 <a:solidFill>
                   <a:srgbClr val="4A4F5A"/>
                 </a:solidFill>
-                <a:latin typeface="Pretendard"/>
+                <a:latin typeface="Apple SD Gothic Neo"/>
+                <a:ea typeface="Apple SD Gothic Neo"/>
+                <a:cs typeface="Apple SD Gothic Neo"/>
               </a:rPr>
               <a:t>· 회사소개서·뉴스레터·세일즈 이메일까지</a:t>
             </a:r>
@@ -5503,7 +5545,9 @@
                 <a:solidFill>
                   <a:srgbClr val="16181D"/>
                 </a:solidFill>
-                <a:latin typeface="Pretendard"/>
+                <a:latin typeface="Apple SD Gothic Neo"/>
+                <a:ea typeface="Apple SD Gothic Neo"/>
+                <a:cs typeface="Apple SD Gothic Neo"/>
               </a:rPr>
               <a:t>다음 관문은 거버넌스다</a:t>
             </a:r>
@@ -5538,11 +5582,13 @@
               </a:spcAft>
             </a:pPr>
             <a:r>
-              <a:rPr sz="1900">
+              <a:rPr sz="1900" b="0">
                 <a:solidFill>
                   <a:srgbClr val="4A4F5A"/>
                 </a:solidFill>
-                <a:latin typeface="Pretendard"/>
+                <a:latin typeface="Apple SD Gothic Neo"/>
+                <a:ea typeface="Apple SD Gothic Neo"/>
+                <a:cs typeface="Apple SD Gothic Neo"/>
               </a:rPr>
               <a:t>· 통합 거버넌스 매니저라는 자리</a:t>
             </a:r>
@@ -5554,11 +5600,13 @@
               </a:spcAft>
             </a:pPr>
             <a:r>
-              <a:rPr sz="1900">
+              <a:rPr sz="1900" b="0">
                 <a:solidFill>
                   <a:srgbClr val="4A4F5A"/>
                 </a:solidFill>
-                <a:latin typeface="Pretendard"/>
+                <a:latin typeface="Apple SD Gothic Neo"/>
+                <a:ea typeface="Apple SD Gothic Neo"/>
+                <a:cs typeface="Apple SD Gothic Neo"/>
               </a:rPr>
               <a:t>· AI 내규와 윤리, 평가 기준</a:t>
             </a:r>
@@ -5570,11 +5618,13 @@
               </a:spcAft>
             </a:pPr>
             <a:r>
-              <a:rPr sz="1900">
+              <a:rPr sz="1900" b="0">
                 <a:solidFill>
                   <a:srgbClr val="4A4F5A"/>
                 </a:solidFill>
-                <a:latin typeface="Pretendard"/>
+                <a:latin typeface="Apple SD Gothic Neo"/>
+                <a:ea typeface="Apple SD Gothic Neo"/>
+                <a:cs typeface="Apple SD Gothic Neo"/>
               </a:rPr>
               <a:t>· 토큰 비용까지 함께 인식할 것</a:t>
             </a:r>
@@ -5586,11 +5636,13 @@
               </a:spcAft>
             </a:pPr>
             <a:r>
-              <a:rPr sz="1900">
+              <a:rPr sz="1900" b="0">
                 <a:solidFill>
                   <a:srgbClr val="4A4F5A"/>
                 </a:solidFill>
-                <a:latin typeface="Pretendard"/>
+                <a:latin typeface="Apple SD Gothic Neo"/>
+                <a:ea typeface="Apple SD Gothic Neo"/>
+                <a:cs typeface="Apple SD Gothic Neo"/>
               </a:rPr>
               <a:t>· 데이터를 얼마나 줘도 되는가</a:t>
             </a:r>
@@ -5694,7 +5746,9 @@
                 <a:solidFill>
                   <a:srgbClr val="16181D"/>
                 </a:solidFill>
-                <a:latin typeface="Pretendard"/>
+                <a:latin typeface="Apple SD Gothic Neo"/>
+                <a:ea typeface="Apple SD Gothic Neo"/>
+                <a:cs typeface="Apple SD Gothic Neo"/>
               </a:rPr>
               <a:t>실행이 사라진 자리에 남는 것은 의도다</a:t>
             </a:r>
@@ -5729,11 +5783,13 @@
               </a:spcAft>
             </a:pPr>
             <a:r>
-              <a:rPr sz="1900">
+              <a:rPr sz="1900" b="0">
                 <a:solidFill>
                   <a:srgbClr val="4A4F5A"/>
                 </a:solidFill>
-                <a:latin typeface="Pretendard"/>
+                <a:latin typeface="Apple SD Gothic Neo"/>
+                <a:ea typeface="Apple SD Gothic Neo"/>
+                <a:cs typeface="Apple SD Gothic Neo"/>
               </a:rPr>
               <a:t>· 모두가 같은 도구를 쓰게 된다</a:t>
             </a:r>
@@ -5745,11 +5801,13 @@
               </a:spcAft>
             </a:pPr>
             <a:r>
-              <a:rPr sz="1900">
+              <a:rPr sz="1900" b="0">
                 <a:solidFill>
                   <a:srgbClr val="4A4F5A"/>
                 </a:solidFill>
-                <a:latin typeface="Pretendard"/>
+                <a:latin typeface="Apple SD Gothic Neo"/>
+                <a:ea typeface="Apple SD Gothic Neo"/>
+                <a:cs typeface="Apple SD Gothic Neo"/>
               </a:rPr>
               <a:t>· 한 사람이 마음먹으면 AI가 길을 찾는다</a:t>
             </a:r>
@@ -5761,11 +5819,13 @@
               </a:spcAft>
             </a:pPr>
             <a:r>
-              <a:rPr sz="1900">
+              <a:rPr sz="1900" b="0">
                 <a:solidFill>
                   <a:srgbClr val="4A4F5A"/>
                 </a:solidFill>
-                <a:latin typeface="Pretendard"/>
+                <a:latin typeface="Apple SD Gothic Neo"/>
+                <a:ea typeface="Apple SD Gothic Neo"/>
+                <a:cs typeface="Apple SD Gothic Neo"/>
               </a:rPr>
               <a:t>· 그래서 의도를 감사할 체계가 필요하다</a:t>
             </a:r>
@@ -5869,7 +5929,9 @@
                 <a:solidFill>
                   <a:srgbClr val="16181D"/>
                 </a:solidFill>
-                <a:latin typeface="Pretendard"/>
+                <a:latin typeface="Apple SD Gothic Neo"/>
+                <a:ea typeface="Apple SD Gothic Neo"/>
+                <a:cs typeface="Apple SD Gothic Neo"/>
               </a:rPr>
               <a:t>과거의 나를 죽여야 새 변화에 적응한다</a:t>
             </a:r>
@@ -5904,11 +5966,13 @@
               </a:spcAft>
             </a:pPr>
             <a:r>
-              <a:rPr sz="1900">
+              <a:rPr sz="1900" b="0">
                 <a:solidFill>
                   <a:srgbClr val="4A4F5A"/>
                 </a:solidFill>
-                <a:latin typeface="Pretendard"/>
+                <a:latin typeface="Apple SD Gothic Neo"/>
+                <a:ea typeface="Apple SD Gothic Neo"/>
+                <a:cs typeface="Apple SD Gothic Neo"/>
               </a:rPr>
               <a:t>· 최전선에 선 사람도 버겁다고 말한다</a:t>
             </a:r>
@@ -5920,11 +5984,13 @@
               </a:spcAft>
             </a:pPr>
             <a:r>
-              <a:rPr sz="1900">
+              <a:rPr sz="1900" b="0">
                 <a:solidFill>
                   <a:srgbClr val="4A4F5A"/>
                 </a:solidFill>
-                <a:latin typeface="Pretendard"/>
+                <a:latin typeface="Apple SD Gothic Neo"/>
+                <a:ea typeface="Apple SD Gothic Neo"/>
+                <a:cs typeface="Apple SD Gothic Neo"/>
               </a:rPr>
               <a:t>· 뒤처진다는 감각은 모두의 것이다</a:t>
             </a:r>
@@ -5936,11 +6002,13 @@
               </a:spcAft>
             </a:pPr>
             <a:r>
-              <a:rPr sz="1900">
+              <a:rPr sz="1900" b="0">
                 <a:solidFill>
                   <a:srgbClr val="4A4F5A"/>
                 </a:solidFill>
-                <a:latin typeface="Pretendard"/>
+                <a:latin typeface="Apple SD Gothic Neo"/>
+                <a:ea typeface="Apple SD Gothic Neo"/>
+                <a:cs typeface="Apple SD Gothic Neo"/>
               </a:rPr>
               <a:t>· 죽기를 각오하면 산다</a:t>
             </a:r>
@@ -6044,7 +6112,9 @@
                 <a:solidFill>
                   <a:srgbClr val="16181D"/>
                 </a:solidFill>
-                <a:latin typeface="Pretendard"/>
+                <a:latin typeface="Apple SD Gothic Neo"/>
+                <a:ea typeface="Apple SD Gothic Neo"/>
+                <a:cs typeface="Apple SD Gothic Neo"/>
               </a:rPr>
               <a:t>오늘의 순서</a:t>
             </a:r>
@@ -6079,11 +6149,13 @@
               </a:spcAft>
             </a:pPr>
             <a:r>
-              <a:rPr sz="1900">
+              <a:rPr sz="1900" b="0">
                 <a:solidFill>
                   <a:srgbClr val="4A4F5A"/>
                 </a:solidFill>
-                <a:latin typeface="Pretendard"/>
+                <a:latin typeface="Apple SD Gothic Neo"/>
+                <a:ea typeface="Apple SD Gothic Neo"/>
+                <a:cs typeface="Apple SD Gothic Neo"/>
               </a:rPr>
               <a:t>· 코파일럿 프레임의 한계</a:t>
             </a:r>
@@ -6095,11 +6167,13 @@
               </a:spcAft>
             </a:pPr>
             <a:r>
-              <a:rPr sz="1900">
+              <a:rPr sz="1900" b="0">
                 <a:solidFill>
                   <a:srgbClr val="4A4F5A"/>
                 </a:solidFill>
-                <a:latin typeface="Pretendard"/>
+                <a:latin typeface="Apple SD Gothic Neo"/>
+                <a:ea typeface="Apple SD Gothic Neo"/>
+                <a:cs typeface="Apple SD Gothic Neo"/>
               </a:rPr>
               <a:t>· 회사의 실체는 중앙 데이터</a:t>
             </a:r>
@@ -6111,11 +6185,13 @@
               </a:spcAft>
             </a:pPr>
             <a:r>
-              <a:rPr sz="1900">
+              <a:rPr sz="1900" b="0">
                 <a:solidFill>
                   <a:srgbClr val="4A4F5A"/>
                 </a:solidFill>
-                <a:latin typeface="Pretendard"/>
+                <a:latin typeface="Apple SD Gothic Neo"/>
+                <a:ea typeface="Apple SD Gothic Neo"/>
+                <a:cs typeface="Apple SD Gothic Neo"/>
               </a:rPr>
               <a:t>· 기록 시스템을 만든 순서</a:t>
             </a:r>
@@ -6127,11 +6203,13 @@
               </a:spcAft>
             </a:pPr>
             <a:r>
-              <a:rPr sz="1900">
+              <a:rPr sz="1900" b="0">
                 <a:solidFill>
                   <a:srgbClr val="4A4F5A"/>
                 </a:solidFill>
-                <a:latin typeface="Pretendard"/>
+                <a:latin typeface="Apple SD Gothic Neo"/>
+                <a:ea typeface="Apple SD Gothic Neo"/>
+                <a:cs typeface="Apple SD Gothic Neo"/>
               </a:rPr>
               <a:t>· 다음 관문, 거버넌스</a:t>
             </a:r>
@@ -6235,7 +6313,9 @@
                 <a:solidFill>
                   <a:srgbClr val="16181D"/>
                 </a:solidFill>
-                <a:latin typeface="Pretendard"/>
+                <a:latin typeface="Apple SD Gothic Neo"/>
+                <a:ea typeface="Apple SD Gothic Neo"/>
+                <a:cs typeface="Apple SD Gothic Neo"/>
               </a:rPr>
               <a:t>우리는 AI를 생산성 도구로만 해석하고 있다</a:t>
             </a:r>
@@ -6270,11 +6350,13 @@
               </a:spcAft>
             </a:pPr>
             <a:r>
-              <a:rPr sz="1900">
+              <a:rPr sz="1900" b="0">
                 <a:solidFill>
                   <a:srgbClr val="4A4F5A"/>
                 </a:solidFill>
-                <a:latin typeface="Pretendard"/>
+                <a:latin typeface="Apple SD Gothic Neo"/>
+                <a:ea typeface="Apple SD Gothic Neo"/>
+                <a:cs typeface="Apple SD Gothic Neo"/>
               </a:rPr>
               <a:t>· 노트북LM·젠스파크 활용법이 대세</a:t>
             </a:r>
@@ -6286,11 +6368,13 @@
               </a:spcAft>
             </a:pPr>
             <a:r>
-              <a:rPr sz="1900">
+              <a:rPr sz="1900" b="0">
                 <a:solidFill>
                   <a:srgbClr val="4A4F5A"/>
                 </a:solidFill>
-                <a:latin typeface="Pretendard"/>
+                <a:latin typeface="Apple SD Gothic Neo"/>
+                <a:ea typeface="Apple SD Gothic Neo"/>
+                <a:cs typeface="Apple SD Gothic Neo"/>
               </a:rPr>
               <a:t>· AI는 나를 돕는 코파일럿이라는 전제</a:t>
             </a:r>
@@ -6302,11 +6386,13 @@
               </a:spcAft>
             </a:pPr>
             <a:r>
-              <a:rPr sz="1900">
+              <a:rPr sz="1900" b="0">
                 <a:solidFill>
                   <a:srgbClr val="4A4F5A"/>
                 </a:solidFill>
-                <a:latin typeface="Pretendard"/>
+                <a:latin typeface="Apple SD Gothic Neo"/>
+                <a:ea typeface="Apple SD Gothic Neo"/>
+                <a:cs typeface="Apple SD Gothic Neo"/>
               </a:rPr>
               <a:t>· 먼저 물을 것은 그 전제가 맞는가</a:t>
             </a:r>
@@ -6410,7 +6496,9 @@
                 <a:solidFill>
                   <a:srgbClr val="16181D"/>
                 </a:solidFill>
-                <a:latin typeface="Pretendard"/>
+                <a:latin typeface="Apple SD Gothic Neo"/>
+                <a:ea typeface="Apple SD Gothic Neo"/>
+                <a:cs typeface="Apple SD Gothic Neo"/>
               </a:rPr>
               <a:t>“그런데 대부분은 지금 저기까지만 하고 있고 팀원으로서의 에이전틱한 AI 그리고 시스템으로서의 AI가 지금 많은 기업들과 모든 세상이 향하는 방향이다라는 것을 말씀해 주셨습니다.”</a:t>
             </a:r>
@@ -6445,7 +6533,9 @@
                 <a:solidFill>
                   <a:srgbClr val="4A4F5A"/>
                 </a:solidFill>
-                <a:latin typeface="Pretendard"/>
+                <a:latin typeface="Apple SD Gothic Neo"/>
+                <a:ea typeface="Apple SD Gothic Neo"/>
+                <a:cs typeface="Apple SD Gothic Neo"/>
               </a:rPr>
               <a:t>— 노션 코리아 지사장의 장표</a:t>
             </a:r>
@@ -6549,7 +6639,9 @@
                 <a:solidFill>
                   <a:srgbClr val="16181D"/>
                 </a:solidFill>
-                <a:latin typeface="Pretendard"/>
+                <a:latin typeface="Apple SD Gothic Neo"/>
+                <a:ea typeface="Apple SD Gothic Neo"/>
+                <a:cs typeface="Apple SD Gothic Neo"/>
               </a:rPr>
               <a:t>AI를 핵심 오퍼레이션으로 쓰는 회사가 이미 있다</a:t>
             </a:r>
@@ -6584,11 +6676,13 @@
               </a:spcAft>
             </a:pPr>
             <a:r>
-              <a:rPr sz="1900">
+              <a:rPr sz="1900" b="0">
                 <a:solidFill>
                   <a:srgbClr val="4A4F5A"/>
                 </a:solidFill>
-                <a:latin typeface="Pretendard"/>
+                <a:latin typeface="Apple SD Gothic Neo"/>
+                <a:ea typeface="Apple SD Gothic Neo"/>
+                <a:cs typeface="Apple SD Gothic Neo"/>
               </a:rPr>
               <a:t>· 지피터스: 교육 전 과정에 AI 전진 배치</a:t>
             </a:r>
@@ -6600,11 +6694,13 @@
               </a:spcAft>
             </a:pPr>
             <a:r>
-              <a:rPr sz="1900">
+              <a:rPr sz="1900" b="0">
                 <a:solidFill>
                   <a:srgbClr val="4A4F5A"/>
                 </a:solidFill>
-                <a:latin typeface="Pretendard"/>
+                <a:latin typeface="Apple SD Gothic Neo"/>
+                <a:ea typeface="Apple SD Gothic Neo"/>
+                <a:cs typeface="Apple SD Gothic Neo"/>
               </a:rPr>
               <a:t>· 랜딩페이지·줌 녹화·SMS 푸시까지</a:t>
             </a:r>
@@ -6616,11 +6712,13 @@
               </a:spcAft>
             </a:pPr>
             <a:r>
-              <a:rPr sz="1900">
+              <a:rPr sz="1900" b="0">
                 <a:solidFill>
                   <a:srgbClr val="4A4F5A"/>
                 </a:solidFill>
-                <a:latin typeface="Pretendard"/>
+                <a:latin typeface="Apple SD Gothic Neo"/>
+                <a:ea typeface="Apple SD Gothic Neo"/>
+                <a:cs typeface="Apple SD Gothic Neo"/>
               </a:rPr>
               <a:t>· 델타 소사이어티: 조직의 뇌를 SSOT로</a:t>
             </a:r>
@@ -6632,11 +6730,13 @@
               </a:spcAft>
             </a:pPr>
             <a:r>
-              <a:rPr sz="1900">
+              <a:rPr sz="1900" b="0">
                 <a:solidFill>
                   <a:srgbClr val="4A4F5A"/>
                 </a:solidFill>
-                <a:latin typeface="Pretendard"/>
+                <a:latin typeface="Apple SD Gothic Neo"/>
+                <a:ea typeface="Apple SD Gothic Neo"/>
+                <a:cs typeface="Apple SD Gothic Neo"/>
               </a:rPr>
               <a:t>· 그 위에 코딩 에이전트를 연결</a:t>
             </a:r>
@@ -6740,7 +6840,9 @@
                 <a:solidFill>
                   <a:srgbClr val="16181D"/>
                 </a:solidFill>
-                <a:latin typeface="Pretendard"/>
+                <a:latin typeface="Apple SD Gothic Neo"/>
+                <a:ea typeface="Apple SD Gothic Neo"/>
+                <a:cs typeface="Apple SD Gothic Neo"/>
               </a:rPr>
               <a:t>“AI는 회사라는 가정 자체를 깨버린다.”</a:t>
             </a:r>
@@ -6775,7 +6877,9 @@
                 <a:solidFill>
                   <a:srgbClr val="4A4F5A"/>
                 </a:solidFill>
-                <a:latin typeface="Pretendard"/>
+                <a:latin typeface="Apple SD Gothic Neo"/>
+                <a:ea typeface="Apple SD Gothic Neo"/>
+                <a:cs typeface="Apple SD Gothic Neo"/>
               </a:rPr>
               <a:t>— 잭 도시</a:t>
             </a:r>
@@ -6879,7 +6983,9 @@
                 <a:solidFill>
                   <a:srgbClr val="16181D"/>
                 </a:solidFill>
-                <a:latin typeface="Pretendard"/>
+                <a:latin typeface="Apple SD Gothic Neo"/>
+                <a:ea typeface="Apple SD Gothic Neo"/>
+                <a:cs typeface="Apple SD Gothic Neo"/>
               </a:rPr>
               <a:t>회사의 실체는 중앙에 쌓인 데이터다</a:t>
             </a:r>
@@ -6983,7 +7089,9 @@
                 <a:solidFill>
                   <a:srgbClr val="16181D"/>
                 </a:solidFill>
-                <a:latin typeface="Pretendard"/>
+                <a:latin typeface="Apple SD Gothic Neo"/>
+                <a:ea typeface="Apple SD Gothic Neo"/>
+                <a:cs typeface="Apple SD Gothic Neo"/>
               </a:rPr>
               <a:t>기록이 쌓일수록 회사는 매일 스스로 나아진다</a:t>
             </a:r>
@@ -7018,11 +7126,13 @@
               </a:spcAft>
             </a:pPr>
             <a:r>
-              <a:rPr sz="1900">
+              <a:rPr sz="1900" b="0">
                 <a:solidFill>
                   <a:srgbClr val="4A4F5A"/>
                 </a:solidFill>
-                <a:latin typeface="Pretendard"/>
+                <a:latin typeface="Apple SD Gothic Neo"/>
+                <a:ea typeface="Apple SD Gothic Neo"/>
+                <a:cs typeface="Apple SD Gothic Neo"/>
               </a:rPr>
               <a:t>· 회의·강연·산출물이 전부 기록으로</a:t>
             </a:r>
@@ -7034,11 +7144,13 @@
               </a:spcAft>
             </a:pPr>
             <a:r>
-              <a:rPr sz="1900">
+              <a:rPr sz="1900" b="0">
                 <a:solidFill>
                   <a:srgbClr val="4A4F5A"/>
                 </a:solidFill>
-                <a:latin typeface="Pretendard"/>
+                <a:latin typeface="Apple SD Gothic Neo"/>
+                <a:ea typeface="Apple SD Gothic Neo"/>
+                <a:cs typeface="Apple SD Gothic Neo"/>
               </a:rPr>
               <a:t>· 쌓일수록 판단과 정보량이 는다</a:t>
             </a:r>
@@ -7050,11 +7162,13 @@
               </a:spcAft>
             </a:pPr>
             <a:r>
-              <a:rPr sz="1900">
+              <a:rPr sz="1900" b="0">
                 <a:solidFill>
                   <a:srgbClr val="4A4F5A"/>
                 </a:solidFill>
-                <a:latin typeface="Pretendard"/>
+                <a:latin typeface="Apple SD Gothic Neo"/>
+                <a:ea typeface="Apple SD Gothic Neo"/>
+                <a:cs typeface="Apple SD Gothic Neo"/>
               </a:rPr>
               <a:t>· AI를 모든 정보 흐름의 중심에 둔다</a:t>
             </a:r>
@@ -7066,11 +7180,13 @@
               </a:spcAft>
             </a:pPr>
             <a:r>
-              <a:rPr sz="1900">
+              <a:rPr sz="1900" b="0">
                 <a:solidFill>
                   <a:srgbClr val="4A4F5A"/>
                 </a:solidFill>
-                <a:latin typeface="Pretendard"/>
+                <a:latin typeface="Apple SD Gothic Neo"/>
+                <a:ea typeface="Apple SD Gothic Neo"/>
+                <a:cs typeface="Apple SD Gothic Neo"/>
               </a:rPr>
               <a:t>· 과제는 그 중앙 시스템을 잘 만드는 것</a:t>
             </a:r>
@@ -7174,7 +7290,9 @@
                 <a:solidFill>
                   <a:srgbClr val="16181D"/>
                 </a:solidFill>
-                <a:latin typeface="Pretendard"/>
+                <a:latin typeface="Apple SD Gothic Neo"/>
+                <a:ea typeface="Apple SD Gothic Neo"/>
+                <a:cs typeface="Apple SD Gothic Neo"/>
               </a:rPr>
               <a:t>역할은 빌더·책임자·거버넌스 셋으로 재편된다</a:t>
             </a:r>
@@ -7209,11 +7327,13 @@
               </a:spcAft>
             </a:pPr>
             <a:r>
-              <a:rPr sz="1900">
+              <a:rPr sz="1900" b="0">
                 <a:solidFill>
                   <a:srgbClr val="4A4F5A"/>
                 </a:solidFill>
-                <a:latin typeface="Pretendard"/>
+                <a:latin typeface="Apple SD Gothic Neo"/>
+                <a:ea typeface="Apple SD Gothic Neo"/>
+                <a:cs typeface="Apple SD Gothic Neo"/>
               </a:rPr>
               <a:t>· 만드는 사람 — 바이브 코딩하는 빌더</a:t>
             </a:r>
@@ -7225,11 +7345,13 @@
               </a:spcAft>
             </a:pPr>
             <a:r>
-              <a:rPr sz="1900">
+              <a:rPr sz="1900" b="0">
                 <a:solidFill>
                   <a:srgbClr val="4A4F5A"/>
                 </a:solidFill>
-                <a:latin typeface="Pretendard"/>
+                <a:latin typeface="Apple SD Gothic Neo"/>
+                <a:ea typeface="Apple SD Gothic Neo"/>
+                <a:cs typeface="Apple SD Gothic Neo"/>
               </a:rPr>
               <a:t>· 책임지는 사람 — 결과를 떠안는 자리</a:t>
             </a:r>
@@ -7241,11 +7363,13 @@
               </a:spcAft>
             </a:pPr>
             <a:r>
-              <a:rPr sz="1900">
+              <a:rPr sz="1900" b="0">
                 <a:solidFill>
                   <a:srgbClr val="4A4F5A"/>
                 </a:solidFill>
-                <a:latin typeface="Pretendard"/>
+                <a:latin typeface="Apple SD Gothic Neo"/>
+                <a:ea typeface="Apple SD Gothic Neo"/>
+                <a:cs typeface="Apple SD Gothic Neo"/>
               </a:rPr>
               <a:t>· 지키는 사람 — 보안·거버넌스 관리자</a:t>
             </a:r>
